--- a/Publication/presentatcia.pptx
+++ b/Publication/presentatcia.pptx
@@ -111,7 +111,7 @@
   </p:defaultTextStyle>
   <p:extLst>
     <p:ext uri="{EFAFB233-063F-42B5-8137-9DF3F51BA10A}">
-      <p15:sldGuideLst xmlns:p15="http://schemas.microsoft.com/office/powerpoint/2012/main" xmlns=""/>
+      <p15:sldGuideLst xmlns="" xmlns:p15="http://schemas.microsoft.com/office/powerpoint/2012/main"/>
     </p:ext>
   </p:extLst>
 </p:presentation>
@@ -142,7 +142,7 @@
     </p:spTree>
     <p:extLst>
       <p:ext uri="{BB962C8B-B14F-4D97-AF65-F5344CB8AC3E}">
-        <p14:creationId xmlns:p14="http://schemas.microsoft.com/office/powerpoint/2010/main" xmlns="" val="3123405059"/>
+        <p14:creationId xmlns="" xmlns:p14="http://schemas.microsoft.com/office/powerpoint/2010/main" val="3123405059"/>
       </p:ext>
     </p:extLst>
   </p:cSld>
@@ -317,7 +317,7 @@
     </p:spTree>
     <p:extLst>
       <p:ext uri="{BB962C8B-B14F-4D97-AF65-F5344CB8AC3E}">
-        <p14:creationId xmlns:p14="http://schemas.microsoft.com/office/powerpoint/2010/main" xmlns="" val="1024086991"/>
+        <p14:creationId xmlns="" xmlns:p14="http://schemas.microsoft.com/office/powerpoint/2010/main" val="1024086991"/>
       </p:ext>
     </p:extLst>
   </p:cSld>
@@ -402,7 +402,7 @@
     </p:spTree>
     <p:extLst>
       <p:ext uri="{BB962C8B-B14F-4D97-AF65-F5344CB8AC3E}">
-        <p14:creationId xmlns:p14="http://schemas.microsoft.com/office/powerpoint/2010/main" xmlns="" val="1024086991"/>
+        <p14:creationId xmlns="" xmlns:p14="http://schemas.microsoft.com/office/powerpoint/2010/main" val="1024086991"/>
       </p:ext>
     </p:extLst>
   </p:cSld>
@@ -487,7 +487,7 @@
     </p:spTree>
     <p:extLst>
       <p:ext uri="{BB962C8B-B14F-4D97-AF65-F5344CB8AC3E}">
-        <p14:creationId xmlns:p14="http://schemas.microsoft.com/office/powerpoint/2010/main" xmlns="" val="1024086991"/>
+        <p14:creationId xmlns="" xmlns:p14="http://schemas.microsoft.com/office/powerpoint/2010/main" val="1024086991"/>
       </p:ext>
     </p:extLst>
   </p:cSld>
@@ -572,7 +572,7 @@
     </p:spTree>
     <p:extLst>
       <p:ext uri="{BB962C8B-B14F-4D97-AF65-F5344CB8AC3E}">
-        <p14:creationId xmlns:p14="http://schemas.microsoft.com/office/powerpoint/2010/main" xmlns="" val="1024086991"/>
+        <p14:creationId xmlns="" xmlns:p14="http://schemas.microsoft.com/office/powerpoint/2010/main" val="1024086991"/>
       </p:ext>
     </p:extLst>
   </p:cSld>
@@ -657,7 +657,7 @@
     </p:spTree>
     <p:extLst>
       <p:ext uri="{BB962C8B-B14F-4D97-AF65-F5344CB8AC3E}">
-        <p14:creationId xmlns:p14="http://schemas.microsoft.com/office/powerpoint/2010/main" xmlns="" val="1024086991"/>
+        <p14:creationId xmlns="" xmlns:p14="http://schemas.microsoft.com/office/powerpoint/2010/main" val="1024086991"/>
       </p:ext>
     </p:extLst>
   </p:cSld>
@@ -742,7 +742,7 @@
     </p:spTree>
     <p:extLst>
       <p:ext uri="{BB962C8B-B14F-4D97-AF65-F5344CB8AC3E}">
-        <p14:creationId xmlns:p14="http://schemas.microsoft.com/office/powerpoint/2010/main" xmlns="" val="1024086991"/>
+        <p14:creationId xmlns="" xmlns:p14="http://schemas.microsoft.com/office/powerpoint/2010/main" val="1024086991"/>
       </p:ext>
     </p:extLst>
   </p:cSld>
@@ -947,7 +947,7 @@
             <a:fld id="{B41ABA4E-CD72-497B-97AA-7213B3980F60}" type="datetimeFigureOut">
               <a:rPr lang="en-US" smtClean="0"/>
               <a:pPr/>
-              <a:t>3/4/2026</a:t>
+              <a:t>3/6/2026</a:t>
             </a:fld>
             <a:endParaRPr lang="en-US"/>
           </a:p>
@@ -1303,7 +1303,7 @@
             <a:fld id="{B41ABA4E-CD72-497B-97AA-7213B3980F60}" type="datetimeFigureOut">
               <a:rPr lang="en-US" smtClean="0"/>
               <a:pPr/>
-              <a:t>3/4/2026</a:t>
+              <a:t>3/6/2026</a:t>
             </a:fld>
             <a:endParaRPr lang="en-US"/>
           </a:p>
@@ -1481,7 +1481,7 @@
             <a:fld id="{B41ABA4E-CD72-497B-97AA-7213B3980F60}" type="datetimeFigureOut">
               <a:rPr lang="en-US" smtClean="0"/>
               <a:pPr/>
-              <a:t>3/4/2026</a:t>
+              <a:t>3/6/2026</a:t>
             </a:fld>
             <a:endParaRPr lang="en-US"/>
           </a:p>
@@ -1627,7 +1627,7 @@
             <a:fld id="{B41ABA4E-CD72-497B-97AA-7213B3980F60}" type="datetimeFigureOut">
               <a:rPr lang="en-US" smtClean="0"/>
               <a:pPr/>
-              <a:t>3/4/2026</a:t>
+              <a:t>3/6/2026</a:t>
             </a:fld>
             <a:endParaRPr lang="en-US"/>
           </a:p>
@@ -1988,7 +1988,7 @@
             <a:fld id="{B41ABA4E-CD72-497B-97AA-7213B3980F60}" type="datetimeFigureOut">
               <a:rPr lang="en-US" smtClean="0"/>
               <a:pPr/>
-              <a:t>3/4/2026</a:t>
+              <a:t>3/6/2026</a:t>
             </a:fld>
             <a:endParaRPr lang="en-US"/>
           </a:p>
@@ -2256,7 +2256,7 @@
             <a:fld id="{B41ABA4E-CD72-497B-97AA-7213B3980F60}" type="datetimeFigureOut">
               <a:rPr lang="en-US" smtClean="0"/>
               <a:pPr/>
-              <a:t>3/4/2026</a:t>
+              <a:t>3/6/2026</a:t>
             </a:fld>
             <a:endParaRPr lang="en-US"/>
           </a:p>
@@ -2621,7 +2621,7 @@
             <a:fld id="{B41ABA4E-CD72-497B-97AA-7213B3980F60}" type="datetimeFigureOut">
               <a:rPr lang="en-US" smtClean="0"/>
               <a:pPr/>
-              <a:t>3/4/2026</a:t>
+              <a:t>3/6/2026</a:t>
             </a:fld>
             <a:endParaRPr lang="en-US"/>
           </a:p>
@@ -2851,7 +2851,7 @@
             <a:fld id="{B41ABA4E-CD72-497B-97AA-7213B3980F60}" type="datetimeFigureOut">
               <a:rPr lang="en-US" smtClean="0"/>
               <a:pPr/>
-              <a:t>3/4/2026</a:t>
+              <a:t>3/6/2026</a:t>
             </a:fld>
             <a:endParaRPr lang="en-US"/>
           </a:p>
@@ -2944,7 +2944,7 @@
             <a:fld id="{B41ABA4E-CD72-497B-97AA-7213B3980F60}" type="datetimeFigureOut">
               <a:rPr lang="en-US" smtClean="0"/>
               <a:pPr/>
-              <a:t>3/4/2026</a:t>
+              <a:t>3/6/2026</a:t>
             </a:fld>
             <a:endParaRPr lang="en-US"/>
           </a:p>
@@ -3214,7 +3214,7 @@
             <a:fld id="{B41ABA4E-CD72-497B-97AA-7213B3980F60}" type="datetimeFigureOut">
               <a:rPr lang="en-US" smtClean="0"/>
               <a:pPr/>
-              <a:t>3/4/2026</a:t>
+              <a:t>3/6/2026</a:t>
             </a:fld>
             <a:endParaRPr lang="en-US"/>
           </a:p>
@@ -3445,7 +3445,7 @@
             <a:fld id="{B41ABA4E-CD72-497B-97AA-7213B3980F60}" type="datetimeFigureOut">
               <a:rPr lang="en-US" smtClean="0"/>
               <a:pPr/>
-              <a:t>3/4/2026</a:t>
+              <a:t>3/6/2026</a:t>
             </a:fld>
             <a:endParaRPr lang="en-US"/>
           </a:p>
@@ -3947,7 +3947,7 @@
             <a:fld id="{B41ABA4E-CD72-497B-97AA-7213B3980F60}" type="datetimeFigureOut">
               <a:rPr lang="en-US" smtClean="0"/>
               <a:pPr/>
-              <a:t>3/4/2026</a:t>
+              <a:t>3/6/2026</a:t>
             </a:fld>
             <a:endParaRPr lang="en-US"/>
           </a:p>
@@ -5021,32 +5021,35 @@
       </p:sp>
       <p:pic>
         <p:nvPicPr>
-          <p:cNvPr id="10" name="Рисунок 9">
-            <a:extLst>
-              <a:ext uri="{FF2B5EF4-FFF2-40B4-BE49-F238E27FC236}">
-                <a16:creationId xmlns:a16="http://schemas.microsoft.com/office/drawing/2014/main" xmlns="" id="{5E0EC951-E2C0-4D82-A767-3C3140FEBC24}"/>
-              </a:ext>
-            </a:extLst>
-          </p:cNvPr>
+          <p:cNvPr id="1027" name="Picture 3"/>
           <p:cNvPicPr>
-            <a:picLocks noChangeAspect="1"/>
+            <a:picLocks noChangeAspect="1" noChangeArrowheads="1"/>
           </p:cNvPicPr>
           <p:nvPr/>
         </p:nvPicPr>
         <p:blipFill>
           <a:blip r:embed="rId3"/>
+          <a:srcRect/>
           <a:stretch>
             <a:fillRect/>
           </a:stretch>
         </p:blipFill>
-        <p:spPr>
-          <a:xfrm>
-            <a:off x="3205164" y="1432323"/>
-            <a:ext cx="2827337" cy="3116578"/>
+        <p:spPr bwMode="auto">
+          <a:xfrm>
+            <a:off x="2762251" y="1330723"/>
+            <a:ext cx="3644002" cy="3413125"/>
           </a:xfrm>
           <a:prstGeom prst="rect">
             <a:avLst/>
           </a:prstGeom>
+          <a:noFill/>
+          <a:ln w="9525">
+            <a:noFill/>
+            <a:miter lim="800000"/>
+            <a:headEnd/>
+            <a:tailEnd/>
+          </a:ln>
+          <a:effectLst/>
         </p:spPr>
       </p:pic>
     </p:spTree>
@@ -6904,7 +6907,7 @@
   <a:extraClrSchemeLst/>
   <a:extLst>
     <a:ext uri="{05A4C25C-085E-4340-85A3-A5531E510DB2}">
-      <thm15:themeFamily xmlns:thm15="http://schemas.microsoft.com/office/thememl/2012/main" xmlns="" name="Office Theme" id="{62F939B6-93AF-4DB8-9C6B-D6C7DFDC589F}" vid="{4A3C46E8-61CC-4603-A589-7422A47A8E4A}"/>
+      <thm15:themeFamily xmlns="" xmlns:thm15="http://schemas.microsoft.com/office/thememl/2012/main" name="Office Theme" id="{62F939B6-93AF-4DB8-9C6B-D6C7DFDC589F}" vid="{4A3C46E8-61CC-4603-A589-7422A47A8E4A}"/>
     </a:ext>
   </a:extLst>
 </a:theme>

--- a/Publication/presentatcia.pptx
+++ b/Publication/presentatcia.pptx
@@ -111,7 +111,7 @@
   </p:defaultTextStyle>
   <p:extLst>
     <p:ext uri="{EFAFB233-063F-42B5-8137-9DF3F51BA10A}">
-      <p15:sldGuideLst xmlns="" xmlns:p15="http://schemas.microsoft.com/office/powerpoint/2012/main"/>
+      <p15:sldGuideLst xmlns:p15="http://schemas.microsoft.com/office/powerpoint/2012/main" xmlns=""/>
     </p:ext>
   </p:extLst>
 </p:presentation>
@@ -142,7 +142,7 @@
     </p:spTree>
     <p:extLst>
       <p:ext uri="{BB962C8B-B14F-4D97-AF65-F5344CB8AC3E}">
-        <p14:creationId xmlns="" xmlns:p14="http://schemas.microsoft.com/office/powerpoint/2010/main" val="3123405059"/>
+        <p14:creationId xmlns:p14="http://schemas.microsoft.com/office/powerpoint/2010/main" xmlns="" val="3123405059"/>
       </p:ext>
     </p:extLst>
   </p:cSld>
@@ -317,7 +317,7 @@
     </p:spTree>
     <p:extLst>
       <p:ext uri="{BB962C8B-B14F-4D97-AF65-F5344CB8AC3E}">
-        <p14:creationId xmlns="" xmlns:p14="http://schemas.microsoft.com/office/powerpoint/2010/main" val="1024086991"/>
+        <p14:creationId xmlns:p14="http://schemas.microsoft.com/office/powerpoint/2010/main" xmlns="" val="1024086991"/>
       </p:ext>
     </p:extLst>
   </p:cSld>
@@ -402,7 +402,7 @@
     </p:spTree>
     <p:extLst>
       <p:ext uri="{BB962C8B-B14F-4D97-AF65-F5344CB8AC3E}">
-        <p14:creationId xmlns="" xmlns:p14="http://schemas.microsoft.com/office/powerpoint/2010/main" val="1024086991"/>
+        <p14:creationId xmlns:p14="http://schemas.microsoft.com/office/powerpoint/2010/main" xmlns="" val="1024086991"/>
       </p:ext>
     </p:extLst>
   </p:cSld>
@@ -487,7 +487,7 @@
     </p:spTree>
     <p:extLst>
       <p:ext uri="{BB962C8B-B14F-4D97-AF65-F5344CB8AC3E}">
-        <p14:creationId xmlns="" xmlns:p14="http://schemas.microsoft.com/office/powerpoint/2010/main" val="1024086991"/>
+        <p14:creationId xmlns:p14="http://schemas.microsoft.com/office/powerpoint/2010/main" xmlns="" val="1024086991"/>
       </p:ext>
     </p:extLst>
   </p:cSld>
@@ -572,7 +572,7 @@
     </p:spTree>
     <p:extLst>
       <p:ext uri="{BB962C8B-B14F-4D97-AF65-F5344CB8AC3E}">
-        <p14:creationId xmlns="" xmlns:p14="http://schemas.microsoft.com/office/powerpoint/2010/main" val="1024086991"/>
+        <p14:creationId xmlns:p14="http://schemas.microsoft.com/office/powerpoint/2010/main" xmlns="" val="1024086991"/>
       </p:ext>
     </p:extLst>
   </p:cSld>
@@ -657,7 +657,7 @@
     </p:spTree>
     <p:extLst>
       <p:ext uri="{BB962C8B-B14F-4D97-AF65-F5344CB8AC3E}">
-        <p14:creationId xmlns="" xmlns:p14="http://schemas.microsoft.com/office/powerpoint/2010/main" val="1024086991"/>
+        <p14:creationId xmlns:p14="http://schemas.microsoft.com/office/powerpoint/2010/main" xmlns="" val="1024086991"/>
       </p:ext>
     </p:extLst>
   </p:cSld>
@@ -742,7 +742,7 @@
     </p:spTree>
     <p:extLst>
       <p:ext uri="{BB962C8B-B14F-4D97-AF65-F5344CB8AC3E}">
-        <p14:creationId xmlns="" xmlns:p14="http://schemas.microsoft.com/office/powerpoint/2010/main" val="1024086991"/>
+        <p14:creationId xmlns:p14="http://schemas.microsoft.com/office/powerpoint/2010/main" xmlns="" val="1024086991"/>
       </p:ext>
     </p:extLst>
   </p:cSld>
@@ -5240,8 +5240,82 @@
                 <a:ea typeface="Arial" pitchFamily="34" charset="-122"/>
                 <a:cs typeface="Arial" pitchFamily="34" charset="-120"/>
               </a:rPr>
-              <a:t> Однонаправленный (UI ← ViewModel ← Repository ← API)</a:t>
-            </a:r>
+              <a:t> </a:t>
+            </a:r>
+            <a:r>
+              <a:rPr lang="en-US" sz="1350" dirty="0" err="1">
+                <a:solidFill>
+                  <a:srgbClr val="CBD5E1"/>
+                </a:solidFill>
+                <a:latin typeface="Arial" pitchFamily="34" charset="0"/>
+                <a:ea typeface="Arial" pitchFamily="34" charset="-122"/>
+                <a:cs typeface="Arial" pitchFamily="34" charset="-120"/>
+              </a:rPr>
+              <a:t>Однонаправленный</a:t>
+            </a:r>
+            <a:r>
+              <a:rPr lang="en-US" sz="1350" dirty="0">
+                <a:solidFill>
+                  <a:srgbClr val="CBD5E1"/>
+                </a:solidFill>
+                <a:latin typeface="Arial" pitchFamily="34" charset="0"/>
+                <a:ea typeface="Arial" pitchFamily="34" charset="-122"/>
+                <a:cs typeface="Arial" pitchFamily="34" charset="-120"/>
+              </a:rPr>
+              <a:t> </a:t>
+            </a:r>
+            <a:r>
+              <a:rPr lang="en-US" sz="1350" dirty="0" smtClean="0">
+                <a:solidFill>
+                  <a:srgbClr val="CBD5E1"/>
+                </a:solidFill>
+                <a:latin typeface="Arial" pitchFamily="34" charset="0"/>
+                <a:ea typeface="Arial" pitchFamily="34" charset="-122"/>
+                <a:cs typeface="Arial" pitchFamily="34" charset="-120"/>
+              </a:rPr>
+              <a:t>(API → Repository → </a:t>
+            </a:r>
+            <a:r>
+              <a:rPr lang="en-US" sz="1350" dirty="0" err="1" smtClean="0">
+                <a:solidFill>
+                  <a:srgbClr val="CBD5E1"/>
+                </a:solidFill>
+                <a:latin typeface="Arial" pitchFamily="34" charset="0"/>
+                <a:ea typeface="Arial" pitchFamily="34" charset="-122"/>
+                <a:cs typeface="Arial" pitchFamily="34" charset="-120"/>
+              </a:rPr>
+              <a:t>ViewModel</a:t>
+            </a:r>
+            <a:r>
+              <a:rPr lang="en-US" sz="1350" smtClean="0">
+                <a:solidFill>
+                  <a:srgbClr val="CBD5E1"/>
+                </a:solidFill>
+                <a:latin typeface="Arial" pitchFamily="34" charset="0"/>
+                <a:ea typeface="Arial" pitchFamily="34" charset="-122"/>
+                <a:cs typeface="Arial" pitchFamily="34" charset="-120"/>
+              </a:rPr>
+              <a:t> → UI</a:t>
+            </a:r>
+            <a:r>
+              <a:rPr lang="en-US" sz="1350" smtClean="0">
+                <a:solidFill>
+                  <a:srgbClr val="CBD5E1"/>
+                </a:solidFill>
+                <a:latin typeface="Arial" pitchFamily="34" charset="0"/>
+                <a:ea typeface="Arial" pitchFamily="34" charset="-122"/>
+                <a:cs typeface="Arial" pitchFamily="34" charset="-120"/>
+              </a:rPr>
+              <a:t>)</a:t>
+            </a:r>
+            <a:endParaRPr lang="en-US" sz="1350" dirty="0">
+              <a:solidFill>
+                <a:srgbClr val="CBD5E1"/>
+              </a:solidFill>
+              <a:latin typeface="Arial" pitchFamily="34" charset="0"/>
+              <a:ea typeface="Arial" pitchFamily="34" charset="-122"/>
+              <a:cs typeface="Arial" pitchFamily="34" charset="-120"/>
+            </a:endParaRPr>
           </a:p>
           <a:p>
             <a:pPr marL="342900" indent="-342900">
@@ -6907,7 +6981,7 @@
   <a:extraClrSchemeLst/>
   <a:extLst>
     <a:ext uri="{05A4C25C-085E-4340-85A3-A5531E510DB2}">
-      <thm15:themeFamily xmlns="" xmlns:thm15="http://schemas.microsoft.com/office/thememl/2012/main" name="Office Theme" id="{62F939B6-93AF-4DB8-9C6B-D6C7DFDC589F}" vid="{4A3C46E8-61CC-4603-A589-7422A47A8E4A}"/>
+      <thm15:themeFamily xmlns:thm15="http://schemas.microsoft.com/office/thememl/2012/main" xmlns="" name="Office Theme" id="{62F939B6-93AF-4DB8-9C6B-D6C7DFDC589F}" vid="{4A3C46E8-61CC-4603-A589-7422A47A8E4A}"/>
     </a:ext>
   </a:extLst>
 </a:theme>
